--- a/reports/BRANCH_FLORES_PERFORMANCE_SUMMARY_20260826_INARA.pptx
+++ b/reports/BRANCH_FLORES_PERFORMANCE_SUMMARY_20260826_INARA.pptx
@@ -22131,7 +22131,7 @@
                           </a:solidFill>
                           <a:latin typeface="Arial"/>
                         </a:rPr>
-                        <a:t>630</a:t>
+                        <a:t>671</a:t>
                       </a:r>
                     </a:p>
                   </a:txBody>
@@ -22178,7 +22178,7 @@
                           </a:solidFill>
                           <a:latin typeface="Arial"/>
                         </a:rPr>
-                        <a:t>1.252</a:t>
+                        <a:t>1.242</a:t>
                       </a:r>
                     </a:p>
                   </a:txBody>
@@ -22225,7 +22225,7 @@
                           </a:solidFill>
                           <a:latin typeface="Arial"/>
                         </a:rPr>
-                        <a:t>3.572</a:t>
+                        <a:t>3.547</a:t>
                       </a:r>
                     </a:p>
                   </a:txBody>
@@ -22272,7 +22272,7 @@
                           </a:solidFill>
                           <a:latin typeface="Arial"/>
                         </a:rPr>
-                        <a:t>303</a:t>
+                        <a:t>298</a:t>
                       </a:r>
                     </a:p>
                   </a:txBody>
@@ -22319,7 +22319,7 @@
                           </a:solidFill>
                           <a:latin typeface="Arial"/>
                         </a:rPr>
-                        <a:t>249</a:t>
+                        <a:t>248</a:t>
                       </a:r>
                     </a:p>
                   </a:txBody>
@@ -22415,7 +22415,7 @@
                           </a:solidFill>
                           <a:latin typeface="Arial"/>
                         </a:rPr>
-                        <a:t>10,5%</a:t>
+                        <a:t>11,2%</a:t>
                       </a:r>
                     </a:p>
                   </a:txBody>
@@ -22462,7 +22462,7 @@
                           </a:solidFill>
                           <a:latin typeface="Arial"/>
                         </a:rPr>
-                        <a:t>20,8%</a:t>
+                        <a:t>20,7%</a:t>
                       </a:r>
                     </a:p>
                   </a:txBody>
@@ -22509,7 +22509,7 @@
                           </a:solidFill>
                           <a:latin typeface="Arial"/>
                         </a:rPr>
-                        <a:t>59,5%</a:t>
+                        <a:t>59,1%</a:t>
                       </a:r>
                     </a:p>
                   </a:txBody>
@@ -22836,7 +22836,7 @@
                 </a:solidFill>
                 <a:latin typeface="Arial"/>
               </a:rPr>
-              <a:t>Jumlah ODP  249</a:t>
+              <a:t>Jumlah ODP  248</a:t>
             </a:r>
           </a:p>
         </p:txBody>
@@ -22871,7 +22871,7 @@
                 </a:solidFill>
                 <a:latin typeface="Arial"/>
               </a:rPr>
-              <a:t>ODP dikunjungi  78 (31,3%)</a:t>
+              <a:t>ODP dikunjungi  78 (31,5%)</a:t>
             </a:r>
           </a:p>
         </p:txBody>
@@ -23093,7 +23093,7 @@
                 </a:solidFill>
                 <a:latin typeface="Arial"/>
               </a:rPr>
-              <a:t>ODP dikunjungi  54 (66,7%)</a:t>
+              <a:t>ODP dikunjungi  55 (67,9%)</a:t>
             </a:r>
           </a:p>
         </p:txBody>
@@ -23163,7 +23163,7 @@
                 </a:solidFill>
                 <a:latin typeface="Arial"/>
               </a:rPr>
-              <a:t>96</a:t>
+              <a:t>97</a:t>
             </a:r>
           </a:p>
         </p:txBody>
